--- a/skills/presentations/assets/pptx/templates/04-benefit-value.pptx
+++ b/skills/presentations/assets/pptx/templates/04-benefit-value.pptx
@@ -5,16 +5,16 @@
     <p:sldMasterId xmlns:r="http://schemas.openxmlformats.org/officeDocument/2006/relationships" id="2147483648" r:id="rId1"/>
   </p:sldMasterIdLst>
   <p:notesMasterIdLst>
-    <p:notesMasterId r:id="Rf2596469fde84efd"/>
+    <p:notesMasterId r:id="R6b537c14ea904c13"/>
   </p:notesMasterIdLst>
   <p:sldIdLst>
-    <p:sldId id="256" r:id="R5b0992126ec04cb7"/>
-    <p:sldId id="257" r:id="R448a4071c35a4c3a"/>
-    <p:sldId id="258" r:id="R40f508452ca34f45"/>
-    <p:sldId id="259" r:id="R48db1b44c6314553"/>
-    <p:sldId id="260" r:id="R242a42acde8e488d"/>
-    <p:sldId id="261" r:id="R3351467141d34efe"/>
-    <p:sldId id="262" r:id="R0f9ccf87110c4422"/>
+    <p:sldId id="256" r:id="R74112d670aea4ea6"/>
+    <p:sldId id="257" r:id="R8414467187574f56"/>
+    <p:sldId id="258" r:id="R6719f1d0736444c0"/>
+    <p:sldId id="259" r:id="R2710b87302d04e81"/>
+    <p:sldId id="260" r:id="R5859539dcc0140c3"/>
+    <p:sldId id="261" r:id="R67bc003c78bd4fca"/>
+    <p:sldId id="262" r:id="R97dd58c76c5d49eb"/>
   </p:sldIdLst>
   <p:sldSz cx="12192000" cy="6858000"/>
   <p:notesSz cx="6858000" cy="9144000"/>

--- a/skills/presentations/assets/pptx/templates/04-benefit-value.pptx
+++ b/skills/presentations/assets/pptx/templates/04-benefit-value.pptx
@@ -5,16 +5,17 @@
     <p:sldMasterId xmlns:r="http://schemas.openxmlformats.org/officeDocument/2006/relationships" id="2147483648" r:id="rId1"/>
   </p:sldMasterIdLst>
   <p:notesMasterIdLst>
-    <p:notesMasterId r:id="R6b537c14ea904c13"/>
+    <p:notesMasterId r:id="Rf7048b23351e4819"/>
   </p:notesMasterIdLst>
   <p:sldIdLst>
-    <p:sldId id="256" r:id="R74112d670aea4ea6"/>
-    <p:sldId id="257" r:id="R8414467187574f56"/>
-    <p:sldId id="258" r:id="R6719f1d0736444c0"/>
-    <p:sldId id="259" r:id="R2710b87302d04e81"/>
-    <p:sldId id="260" r:id="R5859539dcc0140c3"/>
-    <p:sldId id="261" r:id="R67bc003c78bd4fca"/>
-    <p:sldId id="262" r:id="R97dd58c76c5d49eb"/>
+    <p:sldId id="256" r:id="R7dfc649d323c4793"/>
+    <p:sldId id="257" r:id="R6630c0fb5a614afd"/>
+    <p:sldId id="258" r:id="R7d02d68b7e4d422a"/>
+    <p:sldId id="259" r:id="R9e2a91eb925649df"/>
+    <p:sldId id="260" r:id="Rd656a2f28783456f"/>
+    <p:sldId id="261" r:id="R303f72d4cb154e1d"/>
+    <p:sldId id="262" r:id="Rf36e8f5290fc464b"/>
+    <p:sldId id="263" r:id="R887d58cfe3c04713"/>
   </p:sldIdLst>
   <p:sldSz cx="12192000" cy="6858000"/>
   <p:notesSz cx="6858000" cy="9144000"/>
@@ -480,6 +481,30 @@
               <a:t>Cover (template). Benefit &amp; value case</a:t>
             </a:r>
           </a:p>
+          <a:p xmlns:a="http://schemas.openxmlformats.org/drawingml/2006/main">
+            <a:r>
+              <a:rPr lang="en-US"/>
+              <a:t/>
+            </a:r>
+          </a:p>
+          <a:p xmlns:a="http://schemas.openxmlformats.org/drawingml/2006/main">
+            <a:r>
+              <a:rPr lang="en-US"/>
+              <a:t>Platform / shared infra investment impact chain</a:t>
+            </a:r>
+          </a:p>
+          <a:p xmlns:a="http://schemas.openxmlformats.org/drawingml/2006/main">
+            <a:r>
+              <a:rPr lang="en-US"/>
+              <a:t>EM Tools — executive communication / impact framing: https://www.em-tools.io/engineering-manager-responsibilities/executive-communication</a:t>
+            </a:r>
+          </a:p>
+          <a:p xmlns:a="http://schemas.openxmlformats.org/drawingml/2006/main">
+            <a:r>
+              <a:rPr lang="en-US"/>
+              <a:t>StaffEng — strategy as leverage (not ticket dumps): https://staffeng.com/guides/engineering-strategy/</a:t>
+            </a:r>
+          </a:p>
         </p:txBody>
       </p:sp>
     </p:spTree>
@@ -532,7 +557,19 @@
           <a:p xmlns:a="http://schemas.openxmlformats.org/drawingml/2006/main">
             <a:r>
               <a:rPr lang="en-US"/>
-              <a:t>Land a clear portfolio decision.</a:t>
+              <a:t>Platform / shared infra investment impact chain</a:t>
+            </a:r>
+          </a:p>
+          <a:p xmlns:a="http://schemas.openxmlformats.org/drawingml/2006/main">
+            <a:r>
+              <a:rPr lang="en-US"/>
+              <a:t>EM Tools — executive communication / impact framing: https://www.em-tools.io/engineering-manager-responsibilities/executive-communication</a:t>
+            </a:r>
+          </a:p>
+          <a:p xmlns:a="http://schemas.openxmlformats.org/drawingml/2006/main">
+            <a:r>
+              <a:rPr lang="en-US"/>
+              <a:t>StaffEng — strategy as leverage (not ticket dumps): https://staffeng.com/guides/engineering-strategy/</a:t>
             </a:r>
           </a:p>
         </p:txBody>
@@ -587,7 +624,7 @@
           <a:p xmlns:a="http://schemas.openxmlformats.org/drawingml/2006/main">
             <a:r>
               <a:rPr lang="en-US"/>
-              <a:t>No jargon without translation.</a:t>
+              <a:t>Land a clear portfolio decision.</a:t>
             </a:r>
           </a:p>
         </p:txBody>
@@ -642,7 +679,7 @@
           <a:p xmlns:a="http://schemas.openxmlformats.org/drawingml/2006/main">
             <a:r>
               <a:rPr lang="en-US"/>
-              <a:t>Mark correlation vs causation.</a:t>
+              <a:t>No jargon without translation.</a:t>
             </a:r>
           </a:p>
         </p:txBody>
@@ -697,7 +734,7 @@
           <a:p xmlns:a="http://schemas.openxmlformats.org/drawingml/2006/main">
             <a:r>
               <a:rPr lang="en-US"/>
-              <a:t>Credibility &gt; inflated ROI.</a:t>
+              <a:t>Mark correlation vs causation.</a:t>
             </a:r>
           </a:p>
         </p:txBody>
@@ -752,7 +789,7 @@
           <a:p xmlns:a="http://schemas.openxmlformats.org/drawingml/2006/main">
             <a:r>
               <a:rPr lang="en-US"/>
-              <a:t>Walk trade-offs; land recommendation.</a:t>
+              <a:t>Credibility &gt; inflated ROI.</a:t>
             </a:r>
           </a:p>
         </p:txBody>
@@ -766,6 +803,61 @@
 </file>
 
 <file path=ppt/notesSlides/notesSlide7.xml><?xml version="1.0" encoding="utf-8"?>
+<p:notes xmlns:p="http://schemas.openxmlformats.org/presentationml/2006/main">
+  <p:cSld>
+    <p:spTree>
+      <p:nvGrpSpPr>
+        <p:cNvPr id="1" name=""/>
+        <p:cNvGrpSpPr/>
+        <p:nvPr/>
+      </p:nvGrpSpPr>
+      <p:grpSpPr>
+        <a:xfrm xmlns:a="http://schemas.openxmlformats.org/drawingml/2006/main"/>
+      </p:grpSpPr>
+      <p:sp>
+        <p:nvSpPr>
+          <p:cNvPr id="2" name="Slide Image Placeholder 1"/>
+          <p:cNvSpPr/>
+          <p:nvPr>
+            <p:ph type="sldImg" idx="0"/>
+          </p:nvPr>
+        </p:nvSpPr>
+        <p:spPr/>
+        <p:txBody>
+          <a:bodyPr xmlns:a="http://schemas.openxmlformats.org/drawingml/2006/main"/>
+          <a:lstStyle xmlns:a="http://schemas.openxmlformats.org/drawingml/2006/main"/>
+          <a:p xmlns:a="http://schemas.openxmlformats.org/drawingml/2006/main"/>
+        </p:txBody>
+      </p:sp>
+      <p:sp>
+        <p:nvSpPr>
+          <p:cNvPr id="3" name="Notes Placeholder 2"/>
+          <p:cNvSpPr/>
+          <p:nvPr>
+            <p:ph type="body" idx="1"/>
+          </p:nvPr>
+        </p:nvSpPr>
+        <p:spPr/>
+        <p:txBody>
+          <a:bodyPr xmlns:a="http://schemas.openxmlformats.org/drawingml/2006/main"/>
+          <a:lstStyle xmlns:a="http://schemas.openxmlformats.org/drawingml/2006/main"/>
+          <a:p xmlns:a="http://schemas.openxmlformats.org/drawingml/2006/main">
+            <a:r>
+              <a:rPr lang="en-US"/>
+              <a:t>Walk trade-offs; land recommendation.</a:t>
+            </a:r>
+          </a:p>
+        </p:txBody>
+      </p:sp>
+    </p:spTree>
+  </p:cSld>
+  <p:clrMapOvr>
+    <a:masterClrMapping xmlns:a="http://schemas.openxmlformats.org/drawingml/2006/main"/>
+  </p:clrMapOvr>
+</p:notes>
+</file>
+
+<file path=ppt/notesSlides/notesSlide8.xml><?xml version="1.0" encoding="utf-8"?>
 <p:notes xmlns:p="http://schemas.openxmlformats.org/presentationml/2006/main">
   <p:cSld>
     <p:spTree>
@@ -1135,8 +1227,8 @@
         </p:nvSpPr>
         <p:spPr>
           <a:xfrm xmlns:a="http://schemas.openxmlformats.org/drawingml/2006/main">
-            <a:off x="504000" y="1008000"/>
-            <a:ext cx="11088000" cy="324000"/>
+            <a:off x="504000" y="936000"/>
+            <a:ext cx="11088000" cy="306000"/>
           </a:xfrm>
           <a:prstGeom xmlns:a="http://schemas.openxmlformats.org/drawingml/2006/main" prst="rect">
             <a:avLst/>
@@ -1167,8 +1259,8 @@
         </p:nvSpPr>
         <p:spPr>
           <a:xfrm xmlns:a="http://schemas.openxmlformats.org/drawingml/2006/main">
-            <a:off x="504000" y="1440000"/>
-            <a:ext cx="11088000" cy="936000"/>
+            <a:off x="504000" y="1332000"/>
+            <a:ext cx="11088000" cy="900000"/>
           </a:xfrm>
           <a:prstGeom xmlns:a="http://schemas.openxmlformats.org/drawingml/2006/main" prst="rect">
             <a:avLst/>
@@ -1179,7 +1271,7 @@
           <a:lstStyle xmlns:a="http://schemas.openxmlformats.org/drawingml/2006/main"/>
           <a:p xmlns:a="http://schemas.openxmlformats.org/drawingml/2006/main">
             <a:r>
-              <a:rPr lang="en-US" sz="3400" b="1">
+              <a:rPr lang="en-US" sz="3200" b="1">
                 <a:solidFill>
                   <a:srgbClr val="FFFFFF"/>
                 </a:solidFill>
@@ -1199,8 +1291,8 @@
         </p:nvSpPr>
         <p:spPr>
           <a:xfrm xmlns:a="http://schemas.openxmlformats.org/drawingml/2006/main">
-            <a:off x="504000" y="2520000"/>
-            <a:ext cx="11088000" cy="720000"/>
+            <a:off x="504000" y="2340000"/>
+            <a:ext cx="11088000" cy="648000"/>
           </a:xfrm>
           <a:prstGeom xmlns:a="http://schemas.openxmlformats.org/drawingml/2006/main" prst="rect">
             <a:avLst/>
@@ -1211,7 +1303,7 @@
           <a:lstStyle xmlns:a="http://schemas.openxmlformats.org/drawingml/2006/main"/>
           <a:p xmlns:a="http://schemas.openxmlformats.org/drawingml/2006/main">
             <a:r>
-              <a:rPr lang="en-US" sz="1700" b="0">
+              <a:rPr lang="en-US" sz="1600" b="0">
                 <a:solidFill>
                   <a:srgbClr val="CADCFC"/>
                 </a:solidFill>
@@ -1226,6 +1318,38 @@
       <p:sp>
         <p:nvSpPr>
           <p:cNvPr id="100003" name="TextBox 4"/>
+          <p:cNvSpPr txBox="1"/>
+          <p:nvPr/>
+        </p:nvSpPr>
+        <p:spPr>
+          <a:xfrm xmlns:a="http://schemas.openxmlformats.org/drawingml/2006/main">
+            <a:off x="504000" y="3240000"/>
+            <a:ext cx="11088000" cy="576000"/>
+          </a:xfrm>
+          <a:prstGeom xmlns:a="http://schemas.openxmlformats.org/drawingml/2006/main" prst="rect">
+            <a:avLst/>
+          </a:prstGeom>
+        </p:spPr>
+        <p:txBody>
+          <a:bodyPr xmlns:a="http://schemas.openxmlformats.org/drawingml/2006/main"/>
+          <a:lstStyle xmlns:a="http://schemas.openxmlformats.org/drawingml/2006/main"/>
+          <a:p xmlns:a="http://schemas.openxmlformats.org/drawingml/2006/main">
+            <a:r>
+              <a:rPr lang="en-US" sz="1400" b="0">
+                <a:solidFill>
+                  <a:srgbClr val="A0C4E8"/>
+                </a:solidFill>
+                <a:latin typeface="Calibri"/>
+                <a:ea typeface="Calibri"/>
+              </a:rPr>
+              <a:t>Pattern: Platform / shared infra investment impact chain</a:t>
+            </a:r>
+          </a:p>
+        </p:txBody>
+      </p:sp>
+      <p:sp>
+        <p:nvSpPr>
+          <p:cNvPr id="100004" name="TextBox 5"/>
           <p:cNvSpPr txBox="1"/>
           <p:nvPr/>
         </p:nvSpPr>
@@ -1261,6 +1385,279 @@
 </file>
 
 <file path=ppt/slides/slide2.xml><?xml version="1.0" encoding="utf-8"?>
+<p:sld xmlns:p="http://schemas.openxmlformats.org/presentationml/2006/main">
+  <p:cSld name="Pattern provenance">
+    <p:bg>
+      <p:bgPr>
+        <a:solidFill xmlns:a="http://schemas.openxmlformats.org/drawingml/2006/main">
+          <a:srgbClr val="F4F7FC"/>
+        </a:solidFill>
+      </p:bgPr>
+    </p:bg>
+    <p:spTree>
+      <p:nvGrpSpPr>
+        <p:cNvPr id="1" name=""/>
+        <p:cNvGrpSpPr/>
+        <p:nvPr/>
+      </p:nvGrpSpPr>
+      <p:grpSpPr/>
+      <p:sp>
+        <p:nvSpPr>
+          <p:cNvPr id="100005" name="TextBox 1"/>
+          <p:cNvSpPr txBox="1"/>
+          <p:nvPr/>
+        </p:nvSpPr>
+        <p:spPr>
+          <a:xfrm xmlns:a="http://schemas.openxmlformats.org/drawingml/2006/main">
+            <a:off x="504000" y="270000"/>
+            <a:ext cx="11088000" cy="270000"/>
+          </a:xfrm>
+          <a:prstGeom xmlns:a="http://schemas.openxmlformats.org/drawingml/2006/main" prst="rect">
+            <a:avLst/>
+          </a:prstGeom>
+        </p:spPr>
+        <p:txBody>
+          <a:bodyPr xmlns:a="http://schemas.openxmlformats.org/drawingml/2006/main"/>
+          <a:lstStyle xmlns:a="http://schemas.openxmlformats.org/drawingml/2006/main"/>
+          <a:p xmlns:a="http://schemas.openxmlformats.org/drawingml/2006/main">
+            <a:r>
+              <a:rPr lang="en-US" sz="1100" b="1">
+                <a:solidFill>
+                  <a:srgbClr val="2B6CB0"/>
+                </a:solidFill>
+                <a:latin typeface="Calibri"/>
+                <a:ea typeface="Calibri"/>
+              </a:rPr>
+              <a:t>WHERE THIS DECK SHAPE COMES FROM</a:t>
+            </a:r>
+          </a:p>
+        </p:txBody>
+      </p:sp>
+      <p:sp>
+        <p:nvSpPr>
+          <p:cNvPr id="100006" name="TextBox 2"/>
+          <p:cNvSpPr txBox="1"/>
+          <p:nvPr/>
+        </p:nvSpPr>
+        <p:spPr>
+          <a:xfrm xmlns:a="http://schemas.openxmlformats.org/drawingml/2006/main">
+            <a:off x="504000" y="558000"/>
+            <a:ext cx="11088000" cy="612000"/>
+          </a:xfrm>
+          <a:prstGeom xmlns:a="http://schemas.openxmlformats.org/drawingml/2006/main" prst="rect">
+            <a:avLst/>
+          </a:prstGeom>
+        </p:spPr>
+        <p:txBody>
+          <a:bodyPr xmlns:a="http://schemas.openxmlformats.org/drawingml/2006/main"/>
+          <a:lstStyle xmlns:a="http://schemas.openxmlformats.org/drawingml/2006/main"/>
+          <a:p xmlns:a="http://schemas.openxmlformats.org/drawingml/2006/main">
+            <a:r>
+              <a:rPr lang="en-US" sz="2800" b="1">
+                <a:solidFill>
+                  <a:srgbClr val="1A202C"/>
+                </a:solidFill>
+                <a:latin typeface="Calibri"/>
+                <a:ea typeface="Calibri"/>
+              </a:rPr>
+              <a:t>Pattern provenance</a:t>
+            </a:r>
+          </a:p>
+        </p:txBody>
+      </p:sp>
+      <p:sp>
+        <p:nvSpPr>
+          <p:cNvPr id="100007" name="TextBox 3"/>
+          <p:cNvSpPr txBox="1"/>
+          <p:nvPr/>
+        </p:nvSpPr>
+        <p:spPr>
+          <a:xfrm xmlns:a="http://schemas.openxmlformats.org/drawingml/2006/main">
+            <a:off x="504000" y="1260000"/>
+            <a:ext cx="11088000" cy="4860000"/>
+          </a:xfrm>
+          <a:prstGeom xmlns:a="http://schemas.openxmlformats.org/drawingml/2006/main" prst="rect">
+            <a:avLst/>
+          </a:prstGeom>
+          <a:solidFill xmlns:a="http://schemas.openxmlformats.org/drawingml/2006/main">
+            <a:srgbClr val="FFFFFF"/>
+          </a:solidFill>
+        </p:spPr>
+        <p:txBody>
+          <a:bodyPr xmlns:a="http://schemas.openxmlformats.org/drawingml/2006/main"/>
+          <a:lstStyle xmlns:a="http://schemas.openxmlformats.org/drawingml/2006/main"/>
+          <a:p xmlns:a="http://schemas.openxmlformats.org/drawingml/2006/main">
+            <a:r>
+              <a:rPr lang="en-US" sz="1500" b="0">
+                <a:solidFill>
+                  <a:srgbClr val="1A202C"/>
+                </a:solidFill>
+                <a:latin typeface="Calibri"/>
+                <a:ea typeface="Calibri"/>
+              </a:rPr>
+              <a:t>Public pattern (structure only — not a confidential company deck):</a:t>
+            </a:r>
+          </a:p>
+          <a:p xmlns:a="http://schemas.openxmlformats.org/drawingml/2006/main">
+            <a:r>
+              <a:rPr lang="en-US" sz="1500" b="0">
+                <a:solidFill>
+                  <a:srgbClr val="1A202C"/>
+                </a:solidFill>
+                <a:latin typeface="Calibri"/>
+                <a:ea typeface="Calibri"/>
+              </a:rPr>
+              <a:t/>
+            </a:r>
+          </a:p>
+          <a:p xmlns:a="http://schemas.openxmlformats.org/drawingml/2006/main">
+            <a:r>
+              <a:rPr lang="en-US" sz="1500" b="0">
+                <a:solidFill>
+                  <a:srgbClr val="1A202C"/>
+                </a:solidFill>
+                <a:latin typeface="Calibri"/>
+                <a:ea typeface="Calibri"/>
+              </a:rPr>
+              <a:t>Platform / shared infra investment impact chain</a:t>
+            </a:r>
+          </a:p>
+          <a:p xmlns:a="http://schemas.openxmlformats.org/drawingml/2006/main">
+            <a:r>
+              <a:rPr lang="en-US" sz="1500" b="0">
+                <a:solidFill>
+                  <a:srgbClr val="1A202C"/>
+                </a:solidFill>
+                <a:latin typeface="Calibri"/>
+                <a:ea typeface="Calibri"/>
+              </a:rPr>
+              <a:t/>
+            </a:r>
+          </a:p>
+          <a:p xmlns:a="http://schemas.openxmlformats.org/drawingml/2006/main">
+            <a:r>
+              <a:rPr lang="en-US" sz="1500" b="0">
+                <a:solidFill>
+                  <a:srgbClr val="1A202C"/>
+                </a:solidFill>
+                <a:latin typeface="Calibri"/>
+                <a:ea typeface="Calibri"/>
+              </a:rPr>
+              <a:t>• EM Tools — executive communication / impact framing</a:t>
+            </a:r>
+          </a:p>
+          <a:p xmlns:a="http://schemas.openxmlformats.org/drawingml/2006/main">
+            <a:r>
+              <a:rPr lang="en-US" sz="1500" b="0">
+                <a:solidFill>
+                  <a:srgbClr val="1A202C"/>
+                </a:solidFill>
+                <a:latin typeface="Calibri"/>
+                <a:ea typeface="Calibri"/>
+              </a:rPr>
+              <a:t>  https://www.em-tools.io/engineering-manager-responsibilities/executive-communication</a:t>
+            </a:r>
+          </a:p>
+          <a:p xmlns:a="http://schemas.openxmlformats.org/drawingml/2006/main">
+            <a:r>
+              <a:rPr lang="en-US" sz="1500" b="0">
+                <a:solidFill>
+                  <a:srgbClr val="1A202C"/>
+                </a:solidFill>
+                <a:latin typeface="Calibri"/>
+                <a:ea typeface="Calibri"/>
+              </a:rPr>
+              <a:t>• StaffEng — strategy as leverage (not ticket dumps)</a:t>
+            </a:r>
+          </a:p>
+          <a:p xmlns:a="http://schemas.openxmlformats.org/drawingml/2006/main">
+            <a:r>
+              <a:rPr lang="en-US" sz="1500" b="0">
+                <a:solidFill>
+                  <a:srgbClr val="1A202C"/>
+                </a:solidFill>
+                <a:latin typeface="Calibri"/>
+                <a:ea typeface="Calibri"/>
+              </a:rPr>
+              <a:t>  https://staffeng.com/guides/engineering-strategy/</a:t>
+            </a:r>
+          </a:p>
+          <a:p xmlns:a="http://schemas.openxmlformats.org/drawingml/2006/main">
+            <a:r>
+              <a:rPr lang="en-US" sz="1500" b="0">
+                <a:solidFill>
+                  <a:srgbClr val="1A202C"/>
+                </a:solidFill>
+                <a:latin typeface="Calibri"/>
+                <a:ea typeface="Calibri"/>
+              </a:rPr>
+              <a:t/>
+            </a:r>
+          </a:p>
+          <a:p xmlns:a="http://schemas.openxmlformats.org/drawingml/2006/main">
+            <a:r>
+              <a:rPr lang="en-US" sz="1500" b="0">
+                <a:solidFill>
+                  <a:srgbClr val="1A202C"/>
+                </a:solidFill>
+                <a:latin typeface="Calibri"/>
+                <a:ea typeface="Calibri"/>
+              </a:rPr>
+              <a:t>How to use: copy section order and decision verbs; replace with your metrics.</a:t>
+            </a:r>
+          </a:p>
+          <a:p xmlns:a="http://schemas.openxmlformats.org/drawingml/2006/main">
+            <a:r>
+              <a:rPr lang="en-US" sz="1500" b="0">
+                <a:solidFill>
+                  <a:srgbClr val="1A202C"/>
+                </a:solidFill>
+                <a:latin typeface="Calibri"/>
+                <a:ea typeface="Calibri"/>
+              </a:rPr>
+              <a:t>In-repo: skills/presentations/classic-public-cases.md</a:t>
+            </a:r>
+          </a:p>
+        </p:txBody>
+      </p:sp>
+      <p:sp>
+        <p:nvSpPr>
+          <p:cNvPr id="100008" name="TextBox 4"/>
+          <p:cNvSpPr txBox="1"/>
+          <p:nvPr/>
+        </p:nvSpPr>
+        <p:spPr>
+          <a:xfrm xmlns:a="http://schemas.openxmlformats.org/drawingml/2006/main">
+            <a:off x="504000" y="6426000"/>
+            <a:ext cx="11088000" cy="306000"/>
+          </a:xfrm>
+          <a:prstGeom xmlns:a="http://schemas.openxmlformats.org/drawingml/2006/main" prst="rect">
+            <a:avLst/>
+          </a:prstGeom>
+        </p:spPr>
+        <p:txBody>
+          <a:bodyPr xmlns:a="http://schemas.openxmlformats.org/drawingml/2006/main"/>
+          <a:lstStyle xmlns:a="http://schemas.openxmlformats.org/drawingml/2006/main"/>
+          <a:p xmlns:a="http://schemas.openxmlformats.org/drawingml/2006/main">
+            <a:r>
+              <a:rPr lang="en-US" sz="1100" b="0">
+                <a:solidFill>
+                  <a:srgbClr val="718096"/>
+                </a:solidFill>
+                <a:latin typeface="Calibri"/>
+                <a:ea typeface="Calibri"/>
+              </a:rPr>
+              <a:t>Team X  ·  Program Alpha  ·  Qn YYYY  ·  TEMPLATE — replace placeholders</a:t>
+            </a:r>
+          </a:p>
+        </p:txBody>
+      </p:sp>
+    </p:spTree>
+  </p:cSld>
+</p:sld>
+</file>
+
+<file path=ppt/slides/slide3.xml><?xml version="1.0" encoding="utf-8"?>
 <p:sld xmlns:p="http://schemas.openxmlformats.org/presentationml/2006/main">
   <p:cSld name="BLUF — investment vs benefit">
     <p:bg>
@@ -1279,7 +1676,7 @@
       <p:grpSpPr/>
       <p:sp>
         <p:nvSpPr>
-          <p:cNvPr id="100004" name="TextBox 1"/>
+          <p:cNvPr id="100009" name="TextBox 1"/>
           <p:cNvSpPr txBox="1"/>
           <p:nvPr/>
         </p:nvSpPr>
@@ -1311,7 +1708,7 @@
       </p:sp>
       <p:sp>
         <p:nvSpPr>
-          <p:cNvPr id="100005" name="TextBox 2"/>
+          <p:cNvPr id="100010" name="TextBox 2"/>
           <p:cNvSpPr txBox="1"/>
           <p:nvPr/>
         </p:nvSpPr>
@@ -1343,7 +1740,7 @@
       </p:sp>
       <p:sp>
         <p:nvSpPr>
-          <p:cNvPr id="100006" name="TextBox 3"/>
+          <p:cNvPr id="100011" name="TextBox 3"/>
           <p:cNvSpPr txBox="1"/>
           <p:nvPr/>
         </p:nvSpPr>
@@ -1378,7 +1775,7 @@
       </p:sp>
       <p:sp>
         <p:nvSpPr>
-          <p:cNvPr id="100007" name="TextBox 4"/>
+          <p:cNvPr id="100012" name="TextBox 4"/>
           <p:cNvSpPr txBox="1"/>
           <p:nvPr/>
         </p:nvSpPr>
@@ -1437,7 +1834,7 @@
       </p:sp>
       <p:sp>
         <p:nvSpPr>
-          <p:cNvPr id="100008" name="TextBox 5"/>
+          <p:cNvPr id="100013" name="TextBox 5"/>
           <p:cNvSpPr txBox="1"/>
           <p:nvPr/>
         </p:nvSpPr>
@@ -1472,7 +1869,7 @@
 </p:sld>
 </file>
 
-<file path=ppt/slides/slide3.xml><?xml version="1.0" encoding="utf-8"?>
+<file path=ppt/slides/slide4.xml><?xml version="1.0" encoding="utf-8"?>
 <p:sld xmlns:p="http://schemas.openxmlformats.org/presentationml/2006/main">
   <p:cSld name="Business problem attacked">
     <p:bg>
@@ -1491,7 +1888,7 @@
       <p:grpSpPr/>
       <p:sp>
         <p:nvSpPr>
-          <p:cNvPr id="100009" name="TextBox 1"/>
+          <p:cNvPr id="100014" name="TextBox 1"/>
           <p:cNvSpPr txBox="1"/>
           <p:nvPr/>
         </p:nvSpPr>
@@ -1523,7 +1920,7 @@
       </p:sp>
       <p:sp>
         <p:nvSpPr>
-          <p:cNvPr id="100010" name="TextBox 2"/>
+          <p:cNvPr id="100015" name="TextBox 2"/>
           <p:cNvSpPr txBox="1"/>
           <p:nvPr/>
         </p:nvSpPr>
@@ -1570,7 +1967,7 @@
       </p:sp>
       <p:sp>
         <p:nvSpPr>
-          <p:cNvPr id="100011" name="TextBox 3"/>
+          <p:cNvPr id="100016" name="TextBox 3"/>
           <p:cNvSpPr txBox="1"/>
           <p:nvPr/>
         </p:nvSpPr>
@@ -1605,7 +2002,7 @@
 </p:sld>
 </file>
 
-<file path=ppt/slides/slide4.xml><?xml version="1.0" encoding="utf-8"?>
+<file path=ppt/slides/slide5.xml><?xml version="1.0" encoding="utf-8"?>
 <p:sld xmlns:p="http://schemas.openxmlformats.org/presentationml/2006/main">
   <p:cSld name="Impact chain">
     <p:bg>
@@ -1624,7 +2021,7 @@
       <p:grpSpPr/>
       <p:sp>
         <p:nvSpPr>
-          <p:cNvPr id="100012" name="TextBox 1"/>
+          <p:cNvPr id="100017" name="TextBox 1"/>
           <p:cNvSpPr txBox="1"/>
           <p:nvPr/>
         </p:nvSpPr>
@@ -1656,7 +2053,7 @@
       </p:sp>
       <p:sp>
         <p:nvSpPr>
-          <p:cNvPr id="100013" name="TextBox 2"/>
+          <p:cNvPr id="100018" name="TextBox 2"/>
           <p:cNvSpPr txBox="1"/>
           <p:nvPr/>
         </p:nvSpPr>
@@ -1715,7 +2112,7 @@
       </p:sp>
       <p:sp>
         <p:nvSpPr>
-          <p:cNvPr id="100014" name="TextBox 3"/>
+          <p:cNvPr id="100019" name="TextBox 3"/>
           <p:cNvSpPr txBox="1"/>
           <p:nvPr/>
         </p:nvSpPr>
@@ -1750,7 +2147,7 @@
 </p:sld>
 </file>
 
-<file path=ppt/slides/slide5.xml><?xml version="1.0" encoding="utf-8"?>
+<file path=ppt/slides/slide6.xml><?xml version="1.0" encoding="utf-8"?>
 <p:sld xmlns:p="http://schemas.openxmlformats.org/presentationml/2006/main">
   <p:cSld name="Counterfactual &amp; what we will not claim">
     <p:bg>
@@ -1769,7 +2166,7 @@
       <p:grpSpPr/>
       <p:sp>
         <p:nvSpPr>
-          <p:cNvPr id="100015" name="TextBox 1"/>
+          <p:cNvPr id="100020" name="TextBox 1"/>
           <p:cNvSpPr txBox="1"/>
           <p:nvPr/>
         </p:nvSpPr>
@@ -1801,7 +2198,7 @@
       </p:sp>
       <p:sp>
         <p:nvSpPr>
-          <p:cNvPr id="100016" name="TextBox 2"/>
+          <p:cNvPr id="100021" name="TextBox 2"/>
           <p:cNvSpPr txBox="1"/>
           <p:nvPr/>
         </p:nvSpPr>
@@ -1860,7 +2257,7 @@
       </p:sp>
       <p:sp>
         <p:nvSpPr>
-          <p:cNvPr id="100017" name="TextBox 3"/>
+          <p:cNvPr id="100022" name="TextBox 3"/>
           <p:cNvSpPr txBox="1"/>
           <p:nvPr/>
         </p:nvSpPr>
@@ -1895,7 +2292,7 @@
 </p:sld>
 </file>
 
-<file path=ppt/slides/slide6.xml><?xml version="1.0" encoding="utf-8"?>
+<file path=ppt/slides/slide7.xml><?xml version="1.0" encoding="utf-8"?>
 <p:sld xmlns:p="http://schemas.openxmlformats.org/presentationml/2006/main">
   <p:cSld name="Options &amp; recommendation">
     <p:bg>
@@ -1914,7 +2311,7 @@
       <p:grpSpPr/>
       <p:sp>
         <p:nvSpPr>
-          <p:cNvPr id="100018" name="TextBox 1"/>
+          <p:cNvPr id="100023" name="TextBox 1"/>
           <p:cNvSpPr txBox="1"/>
           <p:nvPr/>
         </p:nvSpPr>
@@ -1946,7 +2343,7 @@
       </p:sp>
       <p:sp>
         <p:nvSpPr>
-          <p:cNvPr id="100019" name="TextBox 2"/>
+          <p:cNvPr id="100024" name="TextBox 2"/>
           <p:cNvSpPr txBox="1"/>
           <p:nvPr/>
         </p:nvSpPr>
@@ -1978,7 +2375,7 @@
       </p:sp>
       <p:graphicFrame>
         <p:nvGraphicFramePr>
-          <p:cNvPr id="100020" name="Table 1"/>
+          <p:cNvPr id="100025" name="Table 1"/>
           <p:cNvGraphicFramePr/>
           <p:nvPr/>
         </p:nvGraphicFramePr>
@@ -2378,7 +2775,7 @@
       </p:graphicFrame>
       <p:sp>
         <p:nvSpPr>
-          <p:cNvPr id="100021" name="TextBox 3"/>
+          <p:cNvPr id="100026" name="TextBox 3"/>
           <p:cNvSpPr txBox="1"/>
           <p:nvPr/>
         </p:nvSpPr>
@@ -2413,7 +2810,7 @@
 </p:sld>
 </file>
 
-<file path=ppt/slides/slide7.xml><?xml version="1.0" encoding="utf-8"?>
+<file path=ppt/slides/slide8.xml><?xml version="1.0" encoding="utf-8"?>
 <p:sld xmlns:p="http://schemas.openxmlformats.org/presentationml/2006/main">
   <p:cSld name="Decision &amp; ask">
     <p:bg>
@@ -2432,7 +2829,7 @@
       <p:grpSpPr/>
       <p:sp>
         <p:nvSpPr>
-          <p:cNvPr id="100022" name="TextBox 1"/>
+          <p:cNvPr id="100027" name="TextBox 1"/>
           <p:cNvSpPr txBox="1"/>
           <p:nvPr/>
         </p:nvSpPr>
@@ -2464,7 +2861,7 @@
       </p:sp>
       <p:sp>
         <p:nvSpPr>
-          <p:cNvPr id="100023" name="TextBox 2"/>
+          <p:cNvPr id="100028" name="TextBox 2"/>
           <p:cNvSpPr txBox="1"/>
           <p:nvPr/>
         </p:nvSpPr>
@@ -2496,7 +2893,7 @@
       </p:sp>
       <p:sp>
         <p:nvSpPr>
-          <p:cNvPr id="100024" name="TextBox 3"/>
+          <p:cNvPr id="100029" name="TextBox 3"/>
           <p:cNvSpPr txBox="1"/>
           <p:nvPr/>
         </p:nvSpPr>
@@ -2567,7 +2964,7 @@
       </p:sp>
       <p:sp>
         <p:nvSpPr>
-          <p:cNvPr id="100025" name="TextBox 4"/>
+          <p:cNvPr id="100030" name="TextBox 4"/>
           <p:cNvSpPr txBox="1"/>
           <p:nvPr/>
         </p:nvSpPr>

--- a/skills/presentations/assets/pptx/templates/04-benefit-value.pptx
+++ b/skills/presentations/assets/pptx/templates/04-benefit-value.pptx
@@ -5,17 +5,17 @@
     <p:sldMasterId xmlns:r="http://schemas.openxmlformats.org/officeDocument/2006/relationships" id="2147483648" r:id="rId1"/>
   </p:sldMasterIdLst>
   <p:notesMasterIdLst>
-    <p:notesMasterId r:id="Rf7048b23351e4819"/>
+    <p:notesMasterId r:id="R8091fa8c4c6d4d47"/>
   </p:notesMasterIdLst>
   <p:sldIdLst>
-    <p:sldId id="256" r:id="R7dfc649d323c4793"/>
-    <p:sldId id="257" r:id="R6630c0fb5a614afd"/>
-    <p:sldId id="258" r:id="R7d02d68b7e4d422a"/>
-    <p:sldId id="259" r:id="R9e2a91eb925649df"/>
-    <p:sldId id="260" r:id="Rd656a2f28783456f"/>
-    <p:sldId id="261" r:id="R303f72d4cb154e1d"/>
-    <p:sldId id="262" r:id="Rf36e8f5290fc464b"/>
-    <p:sldId id="263" r:id="R887d58cfe3c04713"/>
+    <p:sldId id="256" r:id="R69672c358e0949db"/>
+    <p:sldId id="257" r:id="R97baa36aadee437a"/>
+    <p:sldId id="258" r:id="R74747661d4224e87"/>
+    <p:sldId id="259" r:id="R0303a0e08c804616"/>
+    <p:sldId id="260" r:id="Ra66526e19cab4c01"/>
+    <p:sldId id="261" r:id="Rdf99931818434d35"/>
+    <p:sldId id="262" r:id="R097b2afa5feb48be"/>
+    <p:sldId id="263" r:id="Rda4a209cde9c42f2"/>
   </p:sldIdLst>
   <p:sldSz cx="12192000" cy="6858000"/>
   <p:notesSz cx="6858000" cy="9144000"/>
@@ -1615,7 +1615,19 @@
                 <a:latin typeface="Calibri"/>
                 <a:ea typeface="Calibri"/>
               </a:rPr>
-              <a:t>In-repo: skills/presentations/classic-public-cases.md</a:t>
+              <a:t>CONTENT TEMPLATE ONLY — do not copy visual design (colors, margins, fonts) as a brand system.</a:t>
+            </a:r>
+          </a:p>
+          <a:p xmlns:a="http://schemas.openxmlformats.org/drawingml/2006/main">
+            <a:r>
+              <a:rPr lang="en-US" sz="1500" b="0">
+                <a:solidFill>
+                  <a:srgbClr val="1A202C"/>
+                </a:solidFill>
+                <a:latin typeface="Calibri"/>
+                <a:ea typeface="Calibri"/>
+              </a:rPr>
+              <a:t>In-repo: skills/presentations/classic-public-cases.md · assets/README.md (agent notice)</a:t>
             </a:r>
           </a:p>
         </p:txBody>
